--- a/FYP/组会/2026.9.24/9.24-v3.pptx
+++ b/FYP/组会/2026.9.24/9.24-v3.pptx
@@ -4275,7 +4275,7 @@
                 </a:solidFill>
                 <a:latin typeface="Arial"/>
               </a:rPr>
-              <a:t>First priority: step 2 — the go/no-go on which dissolves first, Mn or Ru, and at what potential.</a:t>
+              <a:t>First priority: step 2 — find the MnO₂ host window (Mn²⁺ below, MnO₄⁻ above) before loading Ru.</a:t>
             </a:r>
           </a:p>
         </p:txBody>

--- a/FYP/组会/2026.9.24/9.24-v3.pptx
+++ b/FYP/组会/2026.9.24/9.24-v3.pptx
@@ -5283,7 +5283,7 @@
                 </a:solidFill>
                 <a:latin typeface="Arial"/>
               </a:rPr>
-              <a:t>The four steps use adsorbed oxygen only; the free-energy path is the same four steps (left: Adv. Energy Mater. 2023, Fig. 3a; right: Chem. Soc. Rev. 2020, Fig. 3a, adapted).</a:t>
+              <a:t>The four steps use adsorbed oxygen only; the free-energy path is the same four steps (left: Adv. Energy Mater. 2023, Fig. 1a; right: Chem. Soc. Rev. 2020, Fig. 3a, adapted).</a:t>
             </a:r>
           </a:p>
           <a:p>
@@ -5349,7 +5349,7 @@
                 </a:solidFill>
                 <a:latin typeface="Arial"/>
               </a:rPr>
-              <a:t>Adv. Energy Mater. 2023, 13, 2301951, Fig. 3a  ·  Chem. Soc. Rev. 2020, 49, 2196, Fig. 3a (adapted).</a:t>
+              <a:t>Adv. Energy Mater. 2023, 13, 2301391, Fig. 1a  ·  Chem. Soc. Rev. 2020, 49, 2196, Fig. 3a (adapted).</a:t>
             </a:r>
           </a:p>
         </p:txBody>
@@ -5591,7 +5591,7 @@
                 </a:solidFill>
                 <a:latin typeface="Arial"/>
               </a:rPr>
-              <a:t>LOM: lattice oxygen is oxidised and leaves as O₂, so an oxygen vacancy is left behind (Adv. Energy Mater. 2023, Fig. 3b).</a:t>
+              <a:t>LOM: lattice oxygen is oxidised and leaves as O₂, so an oxygen vacancy is left behind (Adv. Energy Mater. 2023, Fig. 1b).</a:t>
             </a:r>
           </a:p>
           <a:p>
@@ -5657,7 +5657,7 @@
                 </a:solidFill>
                 <a:latin typeface="Arial"/>
               </a:rPr>
-              <a:t>Adv. Energy Mater. 2023, 13, 2301951, Fig. 3b and Fig. 3e.</a:t>
+              <a:t>Adv. Energy Mater. 2023, 13, 2301391, Fig. 1b and Fig. 3e.</a:t>
             </a:r>
           </a:p>
         </p:txBody>
@@ -5819,7 +5819,7 @@
       </p:pic>
       <p:pic>
         <p:nvPicPr>
-          <p:cNvPr id="5" name="Picture 4" descr="use_four_paths.png"/>
+          <p:cNvPr id="5" name="Picture 4" descr="fig_opm.png"/>
           <p:cNvPicPr>
             <a:picLocks noChangeAspect="1"/>
           </p:cNvPicPr>
@@ -5833,8 +5833,8 @@
         </p:blipFill>
         <p:spPr>
           <a:xfrm>
-            <a:off x="640080" y="1234440"/>
-            <a:ext cx="7360920" cy="2859360"/>
+            <a:off x="713740" y="1234440"/>
+            <a:ext cx="7213600" cy="3246120"/>
           </a:xfrm>
           <a:prstGeom prst="rect">
             <a:avLst/>
@@ -6017,7 +6017,7 @@
                 </a:solidFill>
                 <a:latin typeface="Arial"/>
               </a:rPr>
-              <a:t>Panel I is the oxide path: two adjacent metal–oxo sites couple directly to O₂, with no *OOH intermediate and no oxygen vacancy (Adv. Energy Mater. 2016, Fig. 1).</a:t>
+              <a:t>Two adjacent M–O sites couple directly to O₂ (step 3); one O₂ costs four sites and four electrons.</a:t>
             </a:r>
           </a:p>
           <a:p>
@@ -6033,7 +6033,7 @@
                 </a:solidFill>
                 <a:latin typeface="Arial"/>
               </a:rPr>
-              <a:t>OPM keeps the surface intact while avoiding the *OOH bottleneck, which is why it is the route we target.</a:t>
+              <a:t>No *OOH (so the AEM limit does not apply) and no vacancy (so no leaching channel) — hence OPM.</a:t>
             </a:r>
           </a:p>
         </p:txBody>
@@ -6067,7 +6067,7 @@
                 </a:solidFill>
                 <a:latin typeface="Arial"/>
               </a:rPr>
-              <a:t>Adv. Energy Mater. 2016, 6, 1601275, Fig. 1  ·  COM: Nature 2022, 611, 702; reviewed in Adv. Energy Mater. 2023, 13, 2301951, §2.</a:t>
+              <a:t>Schematic drawn for this deck after the oxide path in Adv. Energy Mater. 2017, 7, 1601275, Fig. 1 (panel I)  ·  COM: Nature 2022, 611, 702; reviewed in Adv. Energy Mater. 2023, 13, 2301391, §2.</a:t>
             </a:r>
           </a:p>
         </p:txBody>
@@ -6926,7 +6926,7 @@
                 </a:solidFill>
                 <a:latin typeface="Arial"/>
               </a:rPr>
-              <a:t>Adv. Energy Mater. 2023, 13, 2301951, Fig. 3g and §6.</a:t>
+              <a:t>Adv. Energy Mater. 2023, 13, 2301391, Fig. 3g and §6.</a:t>
             </a:r>
           </a:p>
         </p:txBody>
@@ -7362,7 +7362,7 @@
                 </a:solidFill>
                 <a:latin typeface="Arial"/>
               </a:rPr>
-              <a:t>Adv. Energy Mater. 2023, 13, 2301951, Fig. 3c and Fig. 3d; precedent as reviewed there, §6.</a:t>
+              <a:t>Adv. Energy Mater. 2023, 13, 2301391, Fig. 1c and Fig. 1d; precedent as reviewed there, §6.</a:t>
             </a:r>
           </a:p>
         </p:txBody>

--- a/FYP/组会/2026.9.24/9.24-v3.pptx
+++ b/FYP/组会/2026.9.24/9.24-v3.pptx
@@ -5283,7 +5283,7 @@
                 </a:solidFill>
                 <a:latin typeface="Arial"/>
               </a:rPr>
-              <a:t>The four steps use adsorbed oxygen only; the free-energy path is the same four steps (left: Adv. Energy Mater. 2023, Fig. 1a; right: Chem. Soc. Rev. 2020, Fig. 3a, adapted).</a:t>
+              <a:t>The four steps use adsorbed oxygen only; the free-energy path is the same four steps (left: Adv. Energy Mater. 2023, Fig. 1a; right: Chem. Soc. Rev. 2020, Fig. 2a, adapted).</a:t>
             </a:r>
           </a:p>
           <a:p>
@@ -5349,7 +5349,7 @@
                 </a:solidFill>
                 <a:latin typeface="Arial"/>
               </a:rPr>
-              <a:t>Adv. Energy Mater. 2023, 13, 2301391, Fig. 1a  ·  Chem. Soc. Rev. 2020, 49, 2196, Fig. 3a (adapted).</a:t>
+              <a:t>Adv. Energy Mater. 2023, 13, 2301391, Fig. 1a  ·  Chem. Soc. Rev. 2020, 49, 2196, Fig. 2a (adapted).</a:t>
             </a:r>
           </a:p>
         </p:txBody>
@@ -5607,7 +5607,7 @@
                 </a:solidFill>
                 <a:latin typeface="Arial"/>
               </a:rPr>
-              <a:t>It switches on when the oxygen 2p states rise above the metal–oxygen band, close to the Fermi level (Fig. 3e, Mott–Hubbard picture).</a:t>
+              <a:t>It switches on when the oxygen 2p states rise above the metal–oxygen band, close to the Fermi level (Fig. 1e, Mott–Hubbard splitting).</a:t>
             </a:r>
           </a:p>
           <a:p>
@@ -5657,7 +5657,7 @@
                 </a:solidFill>
                 <a:latin typeface="Arial"/>
               </a:rPr>
-              <a:t>Adv. Energy Mater. 2023, 13, 2301391, Fig. 1b and Fig. 3e.</a:t>
+              <a:t>Adv. Energy Mater. 2023, 13, 2301391, Fig. 1b and Fig. 1e.</a:t>
             </a:r>
           </a:p>
         </p:txBody>
@@ -6926,7 +6926,7 @@
                 </a:solidFill>
                 <a:latin typeface="Arial"/>
               </a:rPr>
-              <a:t>Adv. Energy Mater. 2023, 13, 2301391, Fig. 3g and §6.</a:t>
+              <a:t>Adv. Energy Mater. 2023, 13, 2301391, Fig. 1g and §6.</a:t>
             </a:r>
           </a:p>
         </p:txBody>
